--- a/BIS_Standards_Retriever_8_Slide_Deck.pptx
+++ b/BIS_Standards_Retriever_8_Slide_Deck.pptx
@@ -5,16 +5,16 @@
     <p:sldMasterId id="2147483648" r:id="rId1"/>
   </p:sldMasterIdLst>
   <p:sldIdLst>
-    <p:sldId id="256" r:id="rId7"/>
-    <p:sldId id="257" r:id="rId8"/>
-    <p:sldId id="258" r:id="rId9"/>
-    <p:sldId id="259" r:id="rId10"/>
-    <p:sldId id="260" r:id="rId11"/>
-    <p:sldId id="261" r:id="rId12"/>
-    <p:sldId id="262" r:id="rId13"/>
-    <p:sldId id="263" r:id="rId14"/>
+    <p:sldId id="256" r:id="rId2"/>
+    <p:sldId id="257" r:id="rId3"/>
+    <p:sldId id="258" r:id="rId4"/>
+    <p:sldId id="259" r:id="rId5"/>
+    <p:sldId id="260" r:id="rId6"/>
+    <p:sldId id="261" r:id="rId7"/>
+    <p:sldId id="262" r:id="rId8"/>
+    <p:sldId id="263" r:id="rId9"/>
   </p:sldIdLst>
-  <p:sldSz cx="12191695" cy="6858000" type="screen4x3"/>
+  <p:sldSz cx="12192000" cy="6858000"/>
   <p:notesSz cx="6858000" cy="9144000"/>
   <p:defaultTextStyle>
     <a:defPPr>
@@ -111,6 +111,22 @@
       </a:defRPr>
     </a:lvl9pPr>
   </p:defaultTextStyle>
+  <p:extLst>
+    <p:ext uri="{EFAFB233-063F-42B5-8137-9DF3F51BA10A}">
+      <p15:sldGuideLst xmlns:p15="http://schemas.microsoft.com/office/powerpoint/2012/main">
+        <p15:guide id="1" orient="horz" pos="2160">
+          <p15:clr>
+            <a:srgbClr val="A4A3A4"/>
+          </p15:clr>
+        </p15:guide>
+        <p15:guide id="2" pos="2880">
+          <p15:clr>
+            <a:srgbClr val="A4A3A4"/>
+          </p15:clr>
+        </p15:guide>
+      </p15:sldGuideLst>
+    </p:ext>
+  </p:extLst>
 </p:presentation>
 </file>
 
@@ -152,10 +168,9 @@
           <a:lstStyle/>
           <a:p>
             <a:r>
-              <a:rPr lang="en-US" smtClean="0"/>
+              <a:rPr lang="en-US"/>
               <a:t>Click to edit Master title style</a:t>
             </a:r>
-            <a:endParaRPr lang="en-US"/>
           </a:p>
         </p:txBody>
       </p:sp>
@@ -271,10 +286,9 @@
           </a:lstStyle>
           <a:p>
             <a:r>
-              <a:rPr lang="en-US" smtClean="0"/>
+              <a:rPr lang="en-US"/>
               <a:t>Click to edit Master subtitle style</a:t>
             </a:r>
-            <a:endParaRPr lang="en-US"/>
           </a:p>
         </p:txBody>
       </p:sp>
@@ -295,7 +309,7 @@
           <a:p>
             <a:fld id="{5BCAD085-E8A6-8845-BD4E-CB4CCA059FC4}" type="datetimeFigureOut">
               <a:rPr lang="en-US" smtClean="0"/>
-              <a:t>1/27/13</a:t>
+              <a:t>5/4/2026</a:t>
             </a:fld>
             <a:endParaRPr lang="en-US"/>
           </a:p>
@@ -389,10 +403,9 @@
           <a:lstStyle/>
           <a:p>
             <a:r>
-              <a:rPr lang="en-US" smtClean="0"/>
+              <a:rPr lang="en-US"/>
               <a:t>Click to edit Master title style</a:t>
             </a:r>
-            <a:endParaRPr lang="en-US"/>
           </a:p>
         </p:txBody>
       </p:sp>
@@ -413,38 +426,37 @@
           <a:p>
             <a:pPr lvl="0"/>
             <a:r>
-              <a:rPr lang="en-US" smtClean="0"/>
+              <a:rPr lang="en-US"/>
               <a:t>Click to edit Master text styles</a:t>
             </a:r>
           </a:p>
           <a:p>
             <a:pPr lvl="1"/>
             <a:r>
-              <a:rPr lang="en-US" smtClean="0"/>
+              <a:rPr lang="en-US"/>
               <a:t>Second level</a:t>
             </a:r>
           </a:p>
           <a:p>
             <a:pPr lvl="2"/>
             <a:r>
-              <a:rPr lang="en-US" smtClean="0"/>
+              <a:rPr lang="en-US"/>
               <a:t>Third level</a:t>
             </a:r>
           </a:p>
           <a:p>
             <a:pPr lvl="3"/>
             <a:r>
-              <a:rPr lang="en-US" smtClean="0"/>
+              <a:rPr lang="en-US"/>
               <a:t>Fourth level</a:t>
             </a:r>
           </a:p>
           <a:p>
             <a:pPr lvl="4"/>
             <a:r>
-              <a:rPr lang="en-US" smtClean="0"/>
+              <a:rPr lang="en-US"/>
               <a:t>Fifth level</a:t>
             </a:r>
-            <a:endParaRPr lang="en-US"/>
           </a:p>
         </p:txBody>
       </p:sp>
@@ -465,7 +477,7 @@
           <a:p>
             <a:fld id="{5BCAD085-E8A6-8845-BD4E-CB4CCA059FC4}" type="datetimeFigureOut">
               <a:rPr lang="en-US" smtClean="0"/>
-              <a:t>1/27/13</a:t>
+              <a:t>5/4/2026</a:t>
             </a:fld>
             <a:endParaRPr lang="en-US"/>
           </a:p>
@@ -564,10 +576,9 @@
           <a:lstStyle/>
           <a:p>
             <a:r>
-              <a:rPr lang="en-US" smtClean="0"/>
+              <a:rPr lang="en-US"/>
               <a:t>Click to edit Master title style</a:t>
             </a:r>
-            <a:endParaRPr lang="en-US"/>
           </a:p>
         </p:txBody>
       </p:sp>
@@ -593,38 +604,37 @@
           <a:p>
             <a:pPr lvl="0"/>
             <a:r>
-              <a:rPr lang="en-US" smtClean="0"/>
+              <a:rPr lang="en-US"/>
               <a:t>Click to edit Master text styles</a:t>
             </a:r>
           </a:p>
           <a:p>
             <a:pPr lvl="1"/>
             <a:r>
-              <a:rPr lang="en-US" smtClean="0"/>
+              <a:rPr lang="en-US"/>
               <a:t>Second level</a:t>
             </a:r>
           </a:p>
           <a:p>
             <a:pPr lvl="2"/>
             <a:r>
-              <a:rPr lang="en-US" smtClean="0"/>
+              <a:rPr lang="en-US"/>
               <a:t>Third level</a:t>
             </a:r>
           </a:p>
           <a:p>
             <a:pPr lvl="3"/>
             <a:r>
-              <a:rPr lang="en-US" smtClean="0"/>
+              <a:rPr lang="en-US"/>
               <a:t>Fourth level</a:t>
             </a:r>
           </a:p>
           <a:p>
             <a:pPr lvl="4"/>
             <a:r>
-              <a:rPr lang="en-US" smtClean="0"/>
+              <a:rPr lang="en-US"/>
               <a:t>Fifth level</a:t>
             </a:r>
-            <a:endParaRPr lang="en-US"/>
           </a:p>
         </p:txBody>
       </p:sp>
@@ -645,7 +655,7 @@
           <a:p>
             <a:fld id="{5BCAD085-E8A6-8845-BD4E-CB4CCA059FC4}" type="datetimeFigureOut">
               <a:rPr lang="en-US" smtClean="0"/>
-              <a:t>1/27/13</a:t>
+              <a:t>5/4/2026</a:t>
             </a:fld>
             <a:endParaRPr lang="en-US"/>
           </a:p>
@@ -739,10 +749,9 @@
           <a:lstStyle/>
           <a:p>
             <a:r>
-              <a:rPr lang="en-US" smtClean="0"/>
+              <a:rPr lang="en-US"/>
               <a:t>Click to edit Master title style</a:t>
             </a:r>
-            <a:endParaRPr lang="en-US"/>
           </a:p>
         </p:txBody>
       </p:sp>
@@ -763,38 +772,37 @@
           <a:p>
             <a:pPr lvl="0"/>
             <a:r>
-              <a:rPr lang="en-US" smtClean="0"/>
+              <a:rPr lang="en-US"/>
               <a:t>Click to edit Master text styles</a:t>
             </a:r>
           </a:p>
           <a:p>
             <a:pPr lvl="1"/>
             <a:r>
-              <a:rPr lang="en-US" smtClean="0"/>
+              <a:rPr lang="en-US"/>
               <a:t>Second level</a:t>
             </a:r>
           </a:p>
           <a:p>
             <a:pPr lvl="2"/>
             <a:r>
-              <a:rPr lang="en-US" smtClean="0"/>
+              <a:rPr lang="en-US"/>
               <a:t>Third level</a:t>
             </a:r>
           </a:p>
           <a:p>
             <a:pPr lvl="3"/>
             <a:r>
-              <a:rPr lang="en-US" smtClean="0"/>
+              <a:rPr lang="en-US"/>
               <a:t>Fourth level</a:t>
             </a:r>
           </a:p>
           <a:p>
             <a:pPr lvl="4"/>
             <a:r>
-              <a:rPr lang="en-US" smtClean="0"/>
+              <a:rPr lang="en-US"/>
               <a:t>Fifth level</a:t>
             </a:r>
-            <a:endParaRPr lang="en-US"/>
           </a:p>
         </p:txBody>
       </p:sp>
@@ -815,7 +823,7 @@
           <a:p>
             <a:fld id="{5BCAD085-E8A6-8845-BD4E-CB4CCA059FC4}" type="datetimeFigureOut">
               <a:rPr lang="en-US" smtClean="0"/>
-              <a:t>1/27/13</a:t>
+              <a:t>5/4/2026</a:t>
             </a:fld>
             <a:endParaRPr lang="en-US"/>
           </a:p>
@@ -918,10 +926,9 @@
           </a:lstStyle>
           <a:p>
             <a:r>
-              <a:rPr lang="en-US" smtClean="0"/>
+              <a:rPr lang="en-US"/>
               <a:t>Click to edit Master title style</a:t>
             </a:r>
-            <a:endParaRPr lang="en-US"/>
           </a:p>
         </p:txBody>
       </p:sp>
@@ -1038,7 +1045,7 @@
           <a:p>
             <a:pPr lvl="0"/>
             <a:r>
-              <a:rPr lang="en-US" smtClean="0"/>
+              <a:rPr lang="en-US"/>
               <a:t>Click to edit Master text styles</a:t>
             </a:r>
           </a:p>
@@ -1061,7 +1068,7 @@
           <a:p>
             <a:fld id="{5BCAD085-E8A6-8845-BD4E-CB4CCA059FC4}" type="datetimeFigureOut">
               <a:rPr lang="en-US" smtClean="0"/>
-              <a:t>1/27/13</a:t>
+              <a:t>5/4/2026</a:t>
             </a:fld>
             <a:endParaRPr lang="en-US"/>
           </a:p>
@@ -1155,10 +1162,9 @@
           <a:lstStyle/>
           <a:p>
             <a:r>
-              <a:rPr lang="en-US" smtClean="0"/>
+              <a:rPr lang="en-US"/>
               <a:t>Click to edit Master title style</a:t>
             </a:r>
-            <a:endParaRPr lang="en-US"/>
           </a:p>
         </p:txBody>
       </p:sp>
@@ -1212,38 +1218,37 @@
           <a:p>
             <a:pPr lvl="0"/>
             <a:r>
-              <a:rPr lang="en-US" smtClean="0"/>
+              <a:rPr lang="en-US"/>
               <a:t>Click to edit Master text styles</a:t>
             </a:r>
           </a:p>
           <a:p>
             <a:pPr lvl="1"/>
             <a:r>
-              <a:rPr lang="en-US" smtClean="0"/>
+              <a:rPr lang="en-US"/>
               <a:t>Second level</a:t>
             </a:r>
           </a:p>
           <a:p>
             <a:pPr lvl="2"/>
             <a:r>
-              <a:rPr lang="en-US" smtClean="0"/>
+              <a:rPr lang="en-US"/>
               <a:t>Third level</a:t>
             </a:r>
           </a:p>
           <a:p>
             <a:pPr lvl="3"/>
             <a:r>
-              <a:rPr lang="en-US" smtClean="0"/>
+              <a:rPr lang="en-US"/>
               <a:t>Fourth level</a:t>
             </a:r>
           </a:p>
           <a:p>
             <a:pPr lvl="4"/>
             <a:r>
-              <a:rPr lang="en-US" smtClean="0"/>
+              <a:rPr lang="en-US"/>
               <a:t>Fifth level</a:t>
             </a:r>
-            <a:endParaRPr lang="en-US"/>
           </a:p>
         </p:txBody>
       </p:sp>
@@ -1297,38 +1302,37 @@
           <a:p>
             <a:pPr lvl="0"/>
             <a:r>
-              <a:rPr lang="en-US" smtClean="0"/>
+              <a:rPr lang="en-US"/>
               <a:t>Click to edit Master text styles</a:t>
             </a:r>
           </a:p>
           <a:p>
             <a:pPr lvl="1"/>
             <a:r>
-              <a:rPr lang="en-US" smtClean="0"/>
+              <a:rPr lang="en-US"/>
               <a:t>Second level</a:t>
             </a:r>
           </a:p>
           <a:p>
             <a:pPr lvl="2"/>
             <a:r>
-              <a:rPr lang="en-US" smtClean="0"/>
+              <a:rPr lang="en-US"/>
               <a:t>Third level</a:t>
             </a:r>
           </a:p>
           <a:p>
             <a:pPr lvl="3"/>
             <a:r>
-              <a:rPr lang="en-US" smtClean="0"/>
+              <a:rPr lang="en-US"/>
               <a:t>Fourth level</a:t>
             </a:r>
           </a:p>
           <a:p>
             <a:pPr lvl="4"/>
             <a:r>
-              <a:rPr lang="en-US" smtClean="0"/>
+              <a:rPr lang="en-US"/>
               <a:t>Fifth level</a:t>
             </a:r>
-            <a:endParaRPr lang="en-US"/>
           </a:p>
         </p:txBody>
       </p:sp>
@@ -1349,7 +1353,7 @@
           <a:p>
             <a:fld id="{5BCAD085-E8A6-8845-BD4E-CB4CCA059FC4}" type="datetimeFigureOut">
               <a:rPr lang="en-US" smtClean="0"/>
-              <a:t>1/27/13</a:t>
+              <a:t>5/4/2026</a:t>
             </a:fld>
             <a:endParaRPr lang="en-US"/>
           </a:p>
@@ -1447,10 +1451,9 @@
           </a:lstStyle>
           <a:p>
             <a:r>
-              <a:rPr lang="en-US" smtClean="0"/>
+              <a:rPr lang="en-US"/>
               <a:t>Click to edit Master title style</a:t>
             </a:r>
-            <a:endParaRPr lang="en-US"/>
           </a:p>
         </p:txBody>
       </p:sp>
@@ -1513,7 +1516,7 @@
           <a:p>
             <a:pPr lvl="0"/>
             <a:r>
-              <a:rPr lang="en-US" smtClean="0"/>
+              <a:rPr lang="en-US"/>
               <a:t>Click to edit Master text styles</a:t>
             </a:r>
           </a:p>
@@ -1569,38 +1572,37 @@
           <a:p>
             <a:pPr lvl="0"/>
             <a:r>
-              <a:rPr lang="en-US" smtClean="0"/>
+              <a:rPr lang="en-US"/>
               <a:t>Click to edit Master text styles</a:t>
             </a:r>
           </a:p>
           <a:p>
             <a:pPr lvl="1"/>
             <a:r>
-              <a:rPr lang="en-US" smtClean="0"/>
+              <a:rPr lang="en-US"/>
               <a:t>Second level</a:t>
             </a:r>
           </a:p>
           <a:p>
             <a:pPr lvl="2"/>
             <a:r>
-              <a:rPr lang="en-US" smtClean="0"/>
+              <a:rPr lang="en-US"/>
               <a:t>Third level</a:t>
             </a:r>
           </a:p>
           <a:p>
             <a:pPr lvl="3"/>
             <a:r>
-              <a:rPr lang="en-US" smtClean="0"/>
+              <a:rPr lang="en-US"/>
               <a:t>Fourth level</a:t>
             </a:r>
           </a:p>
           <a:p>
             <a:pPr lvl="4"/>
             <a:r>
-              <a:rPr lang="en-US" smtClean="0"/>
+              <a:rPr lang="en-US"/>
               <a:t>Fifth level</a:t>
             </a:r>
-            <a:endParaRPr lang="en-US"/>
           </a:p>
         </p:txBody>
       </p:sp>
@@ -1663,7 +1665,7 @@
           <a:p>
             <a:pPr lvl="0"/>
             <a:r>
-              <a:rPr lang="en-US" smtClean="0"/>
+              <a:rPr lang="en-US"/>
               <a:t>Click to edit Master text styles</a:t>
             </a:r>
           </a:p>
@@ -1719,38 +1721,37 @@
           <a:p>
             <a:pPr lvl="0"/>
             <a:r>
-              <a:rPr lang="en-US" smtClean="0"/>
+              <a:rPr lang="en-US"/>
               <a:t>Click to edit Master text styles</a:t>
             </a:r>
           </a:p>
           <a:p>
             <a:pPr lvl="1"/>
             <a:r>
-              <a:rPr lang="en-US" smtClean="0"/>
+              <a:rPr lang="en-US"/>
               <a:t>Second level</a:t>
             </a:r>
           </a:p>
           <a:p>
             <a:pPr lvl="2"/>
             <a:r>
-              <a:rPr lang="en-US" smtClean="0"/>
+              <a:rPr lang="en-US"/>
               <a:t>Third level</a:t>
             </a:r>
           </a:p>
           <a:p>
             <a:pPr lvl="3"/>
             <a:r>
-              <a:rPr lang="en-US" smtClean="0"/>
+              <a:rPr lang="en-US"/>
               <a:t>Fourth level</a:t>
             </a:r>
           </a:p>
           <a:p>
             <a:pPr lvl="4"/>
             <a:r>
-              <a:rPr lang="en-US" smtClean="0"/>
+              <a:rPr lang="en-US"/>
               <a:t>Fifth level</a:t>
             </a:r>
-            <a:endParaRPr lang="en-US"/>
           </a:p>
         </p:txBody>
       </p:sp>
@@ -1771,7 +1772,7 @@
           <a:p>
             <a:fld id="{5BCAD085-E8A6-8845-BD4E-CB4CCA059FC4}" type="datetimeFigureOut">
               <a:rPr lang="en-US" smtClean="0"/>
-              <a:t>1/27/13</a:t>
+              <a:t>5/4/2026</a:t>
             </a:fld>
             <a:endParaRPr lang="en-US"/>
           </a:p>
@@ -1865,10 +1866,9 @@
           <a:lstStyle/>
           <a:p>
             <a:r>
-              <a:rPr lang="en-US" smtClean="0"/>
+              <a:rPr lang="en-US"/>
               <a:t>Click to edit Master title style</a:t>
             </a:r>
-            <a:endParaRPr lang="en-US"/>
           </a:p>
         </p:txBody>
       </p:sp>
@@ -1889,7 +1889,7 @@
           <a:p>
             <a:fld id="{5BCAD085-E8A6-8845-BD4E-CB4CCA059FC4}" type="datetimeFigureOut">
               <a:rPr lang="en-US" smtClean="0"/>
-              <a:t>1/27/13</a:t>
+              <a:t>5/4/2026</a:t>
             </a:fld>
             <a:endParaRPr lang="en-US"/>
           </a:p>
@@ -1984,7 +1984,7 @@
           <a:p>
             <a:fld id="{5BCAD085-E8A6-8845-BD4E-CB4CCA059FC4}" type="datetimeFigureOut">
               <a:rPr lang="en-US" smtClean="0"/>
-              <a:t>1/27/13</a:t>
+              <a:t>5/4/2026</a:t>
             </a:fld>
             <a:endParaRPr lang="en-US"/>
           </a:p>
@@ -2087,10 +2087,9 @@
           </a:lstStyle>
           <a:p>
             <a:r>
-              <a:rPr lang="en-US" smtClean="0"/>
+              <a:rPr lang="en-US"/>
               <a:t>Click to edit Master title style</a:t>
             </a:r>
-            <a:endParaRPr lang="en-US"/>
           </a:p>
         </p:txBody>
       </p:sp>
@@ -2144,38 +2143,37 @@
           <a:p>
             <a:pPr lvl="0"/>
             <a:r>
-              <a:rPr lang="en-US" smtClean="0"/>
+              <a:rPr lang="en-US"/>
               <a:t>Click to edit Master text styles</a:t>
             </a:r>
           </a:p>
           <a:p>
             <a:pPr lvl="1"/>
             <a:r>
-              <a:rPr lang="en-US" smtClean="0"/>
+              <a:rPr lang="en-US"/>
               <a:t>Second level</a:t>
             </a:r>
           </a:p>
           <a:p>
             <a:pPr lvl="2"/>
             <a:r>
-              <a:rPr lang="en-US" smtClean="0"/>
+              <a:rPr lang="en-US"/>
               <a:t>Third level</a:t>
             </a:r>
           </a:p>
           <a:p>
             <a:pPr lvl="3"/>
             <a:r>
-              <a:rPr lang="en-US" smtClean="0"/>
+              <a:rPr lang="en-US"/>
               <a:t>Fourth level</a:t>
             </a:r>
           </a:p>
           <a:p>
             <a:pPr lvl="4"/>
             <a:r>
-              <a:rPr lang="en-US" smtClean="0"/>
+              <a:rPr lang="en-US"/>
               <a:t>Fifth level</a:t>
             </a:r>
-            <a:endParaRPr lang="en-US"/>
           </a:p>
         </p:txBody>
       </p:sp>
@@ -2238,7 +2236,7 @@
           <a:p>
             <a:pPr lvl="0"/>
             <a:r>
-              <a:rPr lang="en-US" smtClean="0"/>
+              <a:rPr lang="en-US"/>
               <a:t>Click to edit Master text styles</a:t>
             </a:r>
           </a:p>
@@ -2261,7 +2259,7 @@
           <a:p>
             <a:fld id="{5BCAD085-E8A6-8845-BD4E-CB4CCA059FC4}" type="datetimeFigureOut">
               <a:rPr lang="en-US" smtClean="0"/>
-              <a:t>1/27/13</a:t>
+              <a:t>5/4/2026</a:t>
             </a:fld>
             <a:endParaRPr lang="en-US"/>
           </a:p>
@@ -2364,10 +2362,9 @@
           </a:lstStyle>
           <a:p>
             <a:r>
-              <a:rPr lang="en-US" smtClean="0"/>
+              <a:rPr lang="en-US"/>
               <a:t>Click to edit Master title style</a:t>
             </a:r>
-            <a:endParaRPr lang="en-US"/>
           </a:p>
         </p:txBody>
       </p:sp>
@@ -2491,7 +2488,7 @@
           <a:p>
             <a:pPr lvl="0"/>
             <a:r>
-              <a:rPr lang="en-US" smtClean="0"/>
+              <a:rPr lang="en-US"/>
               <a:t>Click to edit Master text styles</a:t>
             </a:r>
           </a:p>
@@ -2514,7 +2511,7 @@
           <a:p>
             <a:fld id="{5BCAD085-E8A6-8845-BD4E-CB4CCA059FC4}" type="datetimeFigureOut">
               <a:rPr lang="en-US" smtClean="0"/>
-              <a:t>1/27/13</a:t>
+              <a:t>5/4/2026</a:t>
             </a:fld>
             <a:endParaRPr lang="en-US"/>
           </a:p>
@@ -2623,10 +2620,9 @@
           <a:lstStyle/>
           <a:p>
             <a:r>
-              <a:rPr lang="en-US" smtClean="0"/>
+              <a:rPr lang="en-US"/>
               <a:t>Click to edit Master title style</a:t>
             </a:r>
-            <a:endParaRPr lang="en-US"/>
           </a:p>
         </p:txBody>
       </p:sp>
@@ -2657,38 +2653,37 @@
           <a:p>
             <a:pPr lvl="0"/>
             <a:r>
-              <a:rPr lang="en-US" smtClean="0"/>
+              <a:rPr lang="en-US"/>
               <a:t>Click to edit Master text styles</a:t>
             </a:r>
           </a:p>
           <a:p>
             <a:pPr lvl="1"/>
             <a:r>
-              <a:rPr lang="en-US" smtClean="0"/>
+              <a:rPr lang="en-US"/>
               <a:t>Second level</a:t>
             </a:r>
           </a:p>
           <a:p>
             <a:pPr lvl="2"/>
             <a:r>
-              <a:rPr lang="en-US" smtClean="0"/>
+              <a:rPr lang="en-US"/>
               <a:t>Third level</a:t>
             </a:r>
           </a:p>
           <a:p>
             <a:pPr lvl="3"/>
             <a:r>
-              <a:rPr lang="en-US" smtClean="0"/>
+              <a:rPr lang="en-US"/>
               <a:t>Fourth level</a:t>
             </a:r>
           </a:p>
           <a:p>
             <a:pPr lvl="4"/>
             <a:r>
-              <a:rPr lang="en-US" smtClean="0"/>
+              <a:rPr lang="en-US"/>
               <a:t>Fifth level</a:t>
             </a:r>
-            <a:endParaRPr lang="en-US"/>
           </a:p>
         </p:txBody>
       </p:sp>
@@ -2727,7 +2722,7 @@
           <a:p>
             <a:fld id="{5BCAD085-E8A6-8845-BD4E-CB4CCA059FC4}" type="datetimeFigureOut">
               <a:rPr lang="en-US" smtClean="0"/>
-              <a:t>1/27/13</a:t>
+              <a:t>5/4/2026</a:t>
             </a:fld>
             <a:endParaRPr lang="en-US"/>
           </a:p>
@@ -3086,7 +3081,7 @@
 </file>
 
 <file path=ppt/slides/slide1.xml><?xml version="1.0" encoding="utf-8"?>
-<p:sld xmlns:a="http://schemas.openxmlformats.org/drawingml/2006/main" xmlns:p="http://schemas.openxmlformats.org/presentationml/2006/main" xmlns:r="http://schemas.openxmlformats.org/officeDocument/2006/relationships">
+<p:sld xmlns:a="http://schemas.openxmlformats.org/drawingml/2006/main" xmlns:r="http://schemas.openxmlformats.org/officeDocument/2006/relationships" xmlns:p="http://schemas.openxmlformats.org/presentationml/2006/main">
   <p:cSld>
     <p:bg>
       <p:bgPr>
@@ -3102,7 +3097,14 @@
         <p:cNvGrpSpPr/>
         <p:nvPr/>
       </p:nvGrpSpPr>
-      <p:grpSpPr/>
+      <p:grpSpPr>
+        <a:xfrm>
+          <a:off x="0" y="0"/>
+          <a:ext cx="0" cy="0"/>
+          <a:chOff x="0" y="0"/>
+          <a:chExt cx="0" cy="0"/>
+        </a:xfrm>
+      </p:grpSpPr>
       <p:sp>
         <p:nvSpPr>
           <p:cNvPr id="2" name="TextBox 1"/>
@@ -3215,6 +3217,7 @@
           <a:lstStyle/>
           <a:p>
             <a:pPr algn="ctr"/>
+            <a:endParaRPr/>
           </a:p>
         </p:txBody>
       </p:sp>
@@ -3258,6 +3261,7 @@
           <a:lstStyle/>
           <a:p>
             <a:pPr algn="ctr"/>
+            <a:endParaRPr/>
           </a:p>
         </p:txBody>
       </p:sp>
@@ -3373,6 +3377,7 @@
           <a:lstStyle/>
           <a:p>
             <a:pPr algn="ctr"/>
+            <a:endParaRPr/>
           </a:p>
         </p:txBody>
       </p:sp>
@@ -3416,6 +3421,7 @@
           <a:lstStyle/>
           <a:p>
             <a:pPr algn="ctr"/>
+            <a:endParaRPr/>
           </a:p>
         </p:txBody>
       </p:sp>
@@ -3531,6 +3537,7 @@
           <a:lstStyle/>
           <a:p>
             <a:pPr algn="ctr"/>
+            <a:endParaRPr/>
           </a:p>
         </p:txBody>
       </p:sp>
@@ -3574,6 +3581,7 @@
           <a:lstStyle/>
           <a:p>
             <a:pPr algn="ctr"/>
+            <a:endParaRPr/>
           </a:p>
         </p:txBody>
       </p:sp>
@@ -3726,7 +3734,7 @@
 </file>
 
 <file path=ppt/slides/slide2.xml><?xml version="1.0" encoding="utf-8"?>
-<p:sld xmlns:a="http://schemas.openxmlformats.org/drawingml/2006/main" xmlns:p="http://schemas.openxmlformats.org/presentationml/2006/main" xmlns:r="http://schemas.openxmlformats.org/officeDocument/2006/relationships">
+<p:sld xmlns:a="http://schemas.openxmlformats.org/drawingml/2006/main" xmlns:r="http://schemas.openxmlformats.org/officeDocument/2006/relationships" xmlns:p="http://schemas.openxmlformats.org/presentationml/2006/main">
   <p:cSld>
     <p:bg>
       <p:bgPr>
@@ -3742,7 +3750,14 @@
         <p:cNvGrpSpPr/>
         <p:nvPr/>
       </p:nvGrpSpPr>
-      <p:grpSpPr/>
+      <p:grpSpPr>
+        <a:xfrm>
+          <a:off x="0" y="0"/>
+          <a:ext cx="0" cy="0"/>
+          <a:chOff x="0" y="0"/>
+          <a:chExt cx="0" cy="0"/>
+        </a:xfrm>
+      </p:grpSpPr>
       <p:sp>
         <p:nvSpPr>
           <p:cNvPr id="2" name="TextBox 1"/>
@@ -3853,6 +3868,7 @@
           <a:lstStyle/>
           <a:p>
             <a:pPr algn="ctr"/>
+            <a:endParaRPr/>
           </a:p>
         </p:txBody>
       </p:sp>
@@ -3896,6 +3912,7 @@
           <a:lstStyle/>
           <a:p>
             <a:pPr algn="ctr"/>
+            <a:endParaRPr/>
           </a:p>
         </p:txBody>
       </p:sp>
@@ -4009,6 +4026,7 @@
           <a:lstStyle/>
           <a:p>
             <a:pPr algn="ctr"/>
+            <a:endParaRPr/>
           </a:p>
         </p:txBody>
       </p:sp>
@@ -4122,6 +4140,7 @@
           <a:lstStyle/>
           <a:p>
             <a:pPr algn="ctr"/>
+            <a:endParaRPr/>
           </a:p>
         </p:txBody>
       </p:sp>
@@ -4235,6 +4254,7 @@
           <a:lstStyle/>
           <a:p>
             <a:pPr algn="ctr"/>
+            <a:endParaRPr/>
           </a:p>
         </p:txBody>
       </p:sp>
@@ -4348,6 +4368,7 @@
           <a:lstStyle/>
           <a:p>
             <a:pPr algn="ctr"/>
+            <a:endParaRPr/>
           </a:p>
         </p:txBody>
       </p:sp>
@@ -4515,6 +4536,7 @@
           <a:lstStyle/>
           <a:p>
             <a:pPr algn="ctr"/>
+            <a:endParaRPr/>
           </a:p>
         </p:txBody>
       </p:sp>
@@ -4558,6 +4580,7 @@
           <a:lstStyle/>
           <a:p>
             <a:pPr algn="ctr"/>
+            <a:endParaRPr/>
           </a:p>
         </p:txBody>
       </p:sp>
@@ -4687,7 +4710,7 @@
 </file>
 
 <file path=ppt/slides/slide3.xml><?xml version="1.0" encoding="utf-8"?>
-<p:sld xmlns:a="http://schemas.openxmlformats.org/drawingml/2006/main" xmlns:p="http://schemas.openxmlformats.org/presentationml/2006/main" xmlns:r="http://schemas.openxmlformats.org/officeDocument/2006/relationships">
+<p:sld xmlns:a="http://schemas.openxmlformats.org/drawingml/2006/main" xmlns:r="http://schemas.openxmlformats.org/officeDocument/2006/relationships" xmlns:p="http://schemas.openxmlformats.org/presentationml/2006/main">
   <p:cSld>
     <p:bg>
       <p:bgPr>
@@ -4703,7 +4726,14 @@
         <p:cNvGrpSpPr/>
         <p:nvPr/>
       </p:nvGrpSpPr>
-      <p:grpSpPr/>
+      <p:grpSpPr>
+        <a:xfrm>
+          <a:off x="0" y="0"/>
+          <a:ext cx="0" cy="0"/>
+          <a:chOff x="0" y="0"/>
+          <a:chExt cx="0" cy="0"/>
+        </a:xfrm>
+      </p:grpSpPr>
       <p:sp>
         <p:nvSpPr>
           <p:cNvPr id="2" name="TextBox 1"/>
@@ -4747,7 +4777,7 @@
         </p:nvSpPr>
         <p:spPr>
           <a:xfrm>
-            <a:off x="621792" y="896112"/>
+            <a:off x="621792" y="749808"/>
             <a:ext cx="9875520" cy="292608"/>
           </a:xfrm>
           <a:prstGeom prst="rect">
@@ -4763,7 +4793,7 @@
           <a:p>
             <a:pPr algn="l"/>
             <a:r>
-              <a:rPr sz="1100" b="0">
+              <a:rPr sz="1100" b="0" dirty="0">
                 <a:solidFill>
                   <a:srgbClr val="58637A"/>
                 </a:solidFill>
@@ -4782,8 +4812,8 @@
         </p:nvSpPr>
         <p:spPr>
           <a:xfrm>
-            <a:off x="594360" y="1170432"/>
-            <a:ext cx="1005840" cy="36576"/>
+            <a:off x="621792" y="1019556"/>
+            <a:ext cx="1005840" cy="45719"/>
           </a:xfrm>
           <a:prstGeom prst="rect">
             <a:avLst/>
@@ -4814,6 +4844,7 @@
           <a:lstStyle/>
           <a:p>
             <a:pPr algn="ctr"/>
+            <a:endParaRPr/>
           </a:p>
         </p:txBody>
       </p:sp>
@@ -4833,7 +4864,7 @@
         </p:blipFill>
         <p:spPr>
           <a:xfrm>
-            <a:off x="685800" y="1325880"/>
+            <a:off x="351826" y="1065275"/>
             <a:ext cx="10835640" cy="5718810"/>
           </a:xfrm>
           <a:prstGeom prst="rect">
@@ -4885,7 +4916,7 @@
 </file>
 
 <file path=ppt/slides/slide4.xml><?xml version="1.0" encoding="utf-8"?>
-<p:sld xmlns:a="http://schemas.openxmlformats.org/drawingml/2006/main" xmlns:p="http://schemas.openxmlformats.org/presentationml/2006/main" xmlns:r="http://schemas.openxmlformats.org/officeDocument/2006/relationships">
+<p:sld xmlns:a="http://schemas.openxmlformats.org/drawingml/2006/main" xmlns:r="http://schemas.openxmlformats.org/officeDocument/2006/relationships" xmlns:p="http://schemas.openxmlformats.org/presentationml/2006/main">
   <p:cSld>
     <p:bg>
       <p:bgPr>
@@ -4901,7 +4932,14 @@
         <p:cNvGrpSpPr/>
         <p:nvPr/>
       </p:nvGrpSpPr>
-      <p:grpSpPr/>
+      <p:grpSpPr>
+        <a:xfrm>
+          <a:off x="0" y="0"/>
+          <a:ext cx="0" cy="0"/>
+          <a:chOff x="0" y="0"/>
+          <a:chExt cx="0" cy="0"/>
+        </a:xfrm>
+      </p:grpSpPr>
       <p:sp>
         <p:nvSpPr>
           <p:cNvPr id="2" name="TextBox 1"/>
@@ -5012,6 +5050,7 @@
           <a:lstStyle/>
           <a:p>
             <a:pPr algn="ctr"/>
+            <a:endParaRPr/>
           </a:p>
         </p:txBody>
       </p:sp>
@@ -5057,6 +5096,7 @@
           <a:lstStyle/>
           <a:p>
             <a:pPr algn="ctr"/>
+            <a:endParaRPr/>
           </a:p>
         </p:txBody>
       </p:sp>
@@ -5100,6 +5140,7 @@
           <a:lstStyle/>
           <a:p>
             <a:pPr algn="ctr"/>
+            <a:endParaRPr/>
           </a:p>
         </p:txBody>
       </p:sp>
@@ -5215,6 +5256,7 @@
           <a:lstStyle/>
           <a:p>
             <a:pPr algn="ctr"/>
+            <a:endParaRPr/>
           </a:p>
         </p:txBody>
       </p:sp>
@@ -5258,6 +5300,7 @@
           <a:lstStyle/>
           <a:p>
             <a:pPr algn="ctr"/>
+            <a:endParaRPr/>
           </a:p>
         </p:txBody>
       </p:sp>
@@ -5373,6 +5416,7 @@
           <a:lstStyle/>
           <a:p>
             <a:pPr algn="ctr"/>
+            <a:endParaRPr/>
           </a:p>
         </p:txBody>
       </p:sp>
@@ -5416,6 +5460,7 @@
           <a:lstStyle/>
           <a:p>
             <a:pPr algn="ctr"/>
+            <a:endParaRPr/>
           </a:p>
         </p:txBody>
       </p:sp>
@@ -5604,7 +5649,7 @@
 </file>
 
 <file path=ppt/slides/slide5.xml><?xml version="1.0" encoding="utf-8"?>
-<p:sld xmlns:a="http://schemas.openxmlformats.org/drawingml/2006/main" xmlns:p="http://schemas.openxmlformats.org/presentationml/2006/main" xmlns:r="http://schemas.openxmlformats.org/officeDocument/2006/relationships">
+<p:sld xmlns:a="http://schemas.openxmlformats.org/drawingml/2006/main" xmlns:r="http://schemas.openxmlformats.org/officeDocument/2006/relationships" xmlns:p="http://schemas.openxmlformats.org/presentationml/2006/main">
   <p:cSld>
     <p:bg>
       <p:bgPr>
@@ -5620,7 +5665,14 @@
         <p:cNvGrpSpPr/>
         <p:nvPr/>
       </p:nvGrpSpPr>
-      <p:grpSpPr/>
+      <p:grpSpPr>
+        <a:xfrm>
+          <a:off x="0" y="0"/>
+          <a:ext cx="0" cy="0"/>
+          <a:chOff x="0" y="0"/>
+          <a:chExt cx="0" cy="0"/>
+        </a:xfrm>
+      </p:grpSpPr>
       <p:sp>
         <p:nvSpPr>
           <p:cNvPr id="2" name="TextBox 1"/>
@@ -5731,6 +5783,7 @@
           <a:lstStyle/>
           <a:p>
             <a:pPr algn="ctr"/>
+            <a:endParaRPr/>
           </a:p>
         </p:txBody>
       </p:sp>
@@ -5776,6 +5829,7 @@
           <a:lstStyle/>
           <a:p>
             <a:pPr algn="ctr"/>
+            <a:endParaRPr/>
           </a:p>
         </p:txBody>
       </p:sp>
@@ -5819,6 +5873,7 @@
           <a:lstStyle/>
           <a:p>
             <a:pPr algn="ctr"/>
+            <a:endParaRPr/>
           </a:p>
         </p:txBody>
       </p:sp>
@@ -5934,6 +5989,7 @@
           <a:lstStyle/>
           <a:p>
             <a:pPr algn="ctr"/>
+            <a:endParaRPr/>
           </a:p>
         </p:txBody>
       </p:sp>
@@ -5977,6 +6033,7 @@
           <a:lstStyle/>
           <a:p>
             <a:pPr algn="ctr"/>
+            <a:endParaRPr/>
           </a:p>
         </p:txBody>
       </p:sp>
@@ -6306,7 +6363,7 @@
 </file>
 
 <file path=ppt/slides/slide6.xml><?xml version="1.0" encoding="utf-8"?>
-<p:sld xmlns:a="http://schemas.openxmlformats.org/drawingml/2006/main" xmlns:p="http://schemas.openxmlformats.org/presentationml/2006/main" xmlns:r="http://schemas.openxmlformats.org/officeDocument/2006/relationships">
+<p:sld xmlns:a="http://schemas.openxmlformats.org/drawingml/2006/main" xmlns:r="http://schemas.openxmlformats.org/officeDocument/2006/relationships" xmlns:p="http://schemas.openxmlformats.org/presentationml/2006/main">
   <p:cSld>
     <p:bg>
       <p:bgPr>
@@ -6322,7 +6379,14 @@
         <p:cNvGrpSpPr/>
         <p:nvPr/>
       </p:nvGrpSpPr>
-      <p:grpSpPr/>
+      <p:grpSpPr>
+        <a:xfrm>
+          <a:off x="0" y="0"/>
+          <a:ext cx="0" cy="0"/>
+          <a:chOff x="0" y="0"/>
+          <a:chExt cx="0" cy="0"/>
+        </a:xfrm>
+      </p:grpSpPr>
       <p:sp>
         <p:nvSpPr>
           <p:cNvPr id="2" name="TextBox 1"/>
@@ -6433,6 +6497,7 @@
           <a:lstStyle/>
           <a:p>
             <a:pPr algn="ctr"/>
+            <a:endParaRPr/>
           </a:p>
         </p:txBody>
       </p:sp>
@@ -6478,6 +6543,7 @@
           <a:lstStyle/>
           <a:p>
             <a:pPr algn="ctr"/>
+            <a:endParaRPr/>
           </a:p>
         </p:txBody>
       </p:sp>
@@ -6628,6 +6694,7 @@
           <a:lstStyle/>
           <a:p>
             <a:pPr algn="ctr"/>
+            <a:endParaRPr/>
           </a:p>
         </p:txBody>
       </p:sp>
@@ -6778,6 +6845,7 @@
           <a:lstStyle/>
           <a:p>
             <a:pPr algn="ctr"/>
+            <a:endParaRPr/>
           </a:p>
         </p:txBody>
       </p:sp>
@@ -7001,7 +7069,7 @@
 </file>
 
 <file path=ppt/slides/slide7.xml><?xml version="1.0" encoding="utf-8"?>
-<p:sld xmlns:a="http://schemas.openxmlformats.org/drawingml/2006/main" xmlns:p="http://schemas.openxmlformats.org/presentationml/2006/main" xmlns:r="http://schemas.openxmlformats.org/officeDocument/2006/relationships">
+<p:sld xmlns:a="http://schemas.openxmlformats.org/drawingml/2006/main" xmlns:r="http://schemas.openxmlformats.org/officeDocument/2006/relationships" xmlns:p="http://schemas.openxmlformats.org/presentationml/2006/main">
   <p:cSld>
     <p:bg>
       <p:bgPr>
@@ -7017,7 +7085,14 @@
         <p:cNvGrpSpPr/>
         <p:nvPr/>
       </p:nvGrpSpPr>
-      <p:grpSpPr/>
+      <p:grpSpPr>
+        <a:xfrm>
+          <a:off x="0" y="0"/>
+          <a:ext cx="0" cy="0"/>
+          <a:chOff x="0" y="0"/>
+          <a:chExt cx="0" cy="0"/>
+        </a:xfrm>
+      </p:grpSpPr>
       <p:sp>
         <p:nvSpPr>
           <p:cNvPr id="2" name="TextBox 1"/>
@@ -7128,6 +7203,7 @@
           <a:lstStyle/>
           <a:p>
             <a:pPr algn="ctr"/>
+            <a:endParaRPr/>
           </a:p>
         </p:txBody>
       </p:sp>
@@ -7173,6 +7249,7 @@
           <a:lstStyle/>
           <a:p>
             <a:pPr algn="ctr"/>
+            <a:endParaRPr/>
           </a:p>
         </p:txBody>
       </p:sp>
@@ -7216,6 +7293,7 @@
           <a:lstStyle/>
           <a:p>
             <a:pPr algn="ctr"/>
+            <a:endParaRPr/>
           </a:p>
         </p:txBody>
       </p:sp>
@@ -7331,6 +7409,7 @@
           <a:lstStyle/>
           <a:p>
             <a:pPr algn="ctr"/>
+            <a:endParaRPr/>
           </a:p>
         </p:txBody>
       </p:sp>
@@ -7374,6 +7453,7 @@
           <a:lstStyle/>
           <a:p>
             <a:pPr algn="ctr"/>
+            <a:endParaRPr/>
           </a:p>
         </p:txBody>
       </p:sp>
@@ -7489,6 +7569,7 @@
           <a:lstStyle/>
           <a:p>
             <a:pPr algn="ctr"/>
+            <a:endParaRPr/>
           </a:p>
         </p:txBody>
       </p:sp>
@@ -7532,6 +7613,7 @@
           <a:lstStyle/>
           <a:p>
             <a:pPr algn="ctr"/>
+            <a:endParaRPr/>
           </a:p>
         </p:txBody>
       </p:sp>
@@ -7684,7 +7766,7 @@
 </file>
 
 <file path=ppt/slides/slide8.xml><?xml version="1.0" encoding="utf-8"?>
-<p:sld xmlns:a="http://schemas.openxmlformats.org/drawingml/2006/main" xmlns:p="http://schemas.openxmlformats.org/presentationml/2006/main" xmlns:r="http://schemas.openxmlformats.org/officeDocument/2006/relationships">
+<p:sld xmlns:a="http://schemas.openxmlformats.org/drawingml/2006/main" xmlns:r="http://schemas.openxmlformats.org/officeDocument/2006/relationships" xmlns:p="http://schemas.openxmlformats.org/presentationml/2006/main">
   <p:cSld>
     <p:bg>
       <p:bgPr>
@@ -7700,7 +7782,14 @@
         <p:cNvGrpSpPr/>
         <p:nvPr/>
       </p:nvGrpSpPr>
-      <p:grpSpPr/>
+      <p:grpSpPr>
+        <a:xfrm>
+          <a:off x="0" y="0"/>
+          <a:ext cx="0" cy="0"/>
+          <a:chOff x="0" y="0"/>
+          <a:chExt cx="0" cy="0"/>
+        </a:xfrm>
+      </p:grpSpPr>
       <p:sp>
         <p:nvSpPr>
           <p:cNvPr id="2" name="TextBox 1"/>
@@ -7813,6 +7902,7 @@
           <a:lstStyle/>
           <a:p>
             <a:pPr algn="ctr"/>
+            <a:endParaRPr/>
           </a:p>
         </p:txBody>
       </p:sp>
@@ -7856,6 +7946,7 @@
           <a:lstStyle/>
           <a:p>
             <a:pPr algn="ctr"/>
+            <a:endParaRPr/>
           </a:p>
         </p:txBody>
       </p:sp>
@@ -7883,7 +7974,7 @@
           <a:p>
             <a:pPr algn="l"/>
             <a:r>
-              <a:rPr sz="1300" b="1">
+              <a:rPr sz="1300" b="1" dirty="0">
                 <a:solidFill>
                   <a:srgbClr val="00897B"/>
                 </a:solidFill>
@@ -7902,8 +7993,8 @@
         </p:nvSpPr>
         <p:spPr>
           <a:xfrm>
-            <a:off x="1161288" y="2578607"/>
-            <a:ext cx="4297680" cy="1261872"/>
+            <a:off x="1033272" y="2542032"/>
+            <a:ext cx="4297680" cy="584775"/>
           </a:xfrm>
           <a:prstGeom prst="rect">
             <a:avLst/>
@@ -7918,7 +8009,7 @@
           <a:p>
             <a:pPr algn="l"/>
             <a:r>
-              <a:rPr sz="1200" b="0">
+              <a:rPr sz="1600" b="0" dirty="0">
                 <a:solidFill>
                   <a:srgbClr val="152644"/>
                 </a:solidFill>
@@ -7926,175 +8017,12 @@
               </a:rPr>
               <a:t>Hiten Anand</a:t>
             </a:r>
-            <a:br/>
-            <a:r>
+            <a:br>
+              <a:rPr sz="1600" dirty="0"/>
+            </a:br>
+            <a:r>
+              <a:rPr sz="1600" dirty="0"/>
               <a:t>Manavi Bangani</a:t>
-            </a:r>
-          </a:p>
-        </p:txBody>
-      </p:sp>
-      <p:sp>
-        <p:nvSpPr>
-          <p:cNvPr id="8" name="Rounded Rectangle 7"/>
-          <p:cNvSpPr/>
-          <p:nvPr/>
-        </p:nvSpPr>
-        <p:spPr>
-          <a:xfrm>
-            <a:off x="6446520" y="2057400"/>
-            <a:ext cx="4663440" cy="1920240"/>
-          </a:xfrm>
-          <a:prstGeom prst="roundRect">
-            <a:avLst/>
-          </a:prstGeom>
-          <a:solidFill>
-            <a:srgbClr val="FFFFFF"/>
-          </a:solidFill>
-          <a:ln>
-            <a:solidFill>
-              <a:srgbClr val="DAE1EC"/>
-            </a:solidFill>
-          </a:ln>
-        </p:spPr>
-        <p:style>
-          <a:lnRef idx="1">
-            <a:schemeClr val="accent1"/>
-          </a:lnRef>
-          <a:fillRef idx="3">
-            <a:schemeClr val="accent1"/>
-          </a:fillRef>
-          <a:effectRef idx="2">
-            <a:schemeClr val="accent1"/>
-          </a:effectRef>
-          <a:fontRef idx="minor">
-            <a:schemeClr val="lt1"/>
-          </a:fontRef>
-        </p:style>
-        <p:txBody>
-          <a:bodyPr rtlCol="0" anchor="ctr"/>
-          <a:lstStyle/>
-          <a:p>
-            <a:pPr algn="ctr"/>
-          </a:p>
-        </p:txBody>
-      </p:sp>
-      <p:sp>
-        <p:nvSpPr>
-          <p:cNvPr id="9" name="Rectangle 8"/>
-          <p:cNvSpPr/>
-          <p:nvPr/>
-        </p:nvSpPr>
-        <p:spPr>
-          <a:xfrm>
-            <a:off x="6446520" y="2057400"/>
-            <a:ext cx="73152" cy="1920240"/>
-          </a:xfrm>
-          <a:prstGeom prst="rect">
-            <a:avLst/>
-          </a:prstGeom>
-          <a:solidFill>
-            <a:srgbClr val="E88C36"/>
-          </a:solidFill>
-          <a:ln>
-            <a:noFill/>
-          </a:ln>
-        </p:spPr>
-        <p:style>
-          <a:lnRef idx="1">
-            <a:schemeClr val="accent1"/>
-          </a:lnRef>
-          <a:fillRef idx="3">
-            <a:schemeClr val="accent1"/>
-          </a:fillRef>
-          <a:effectRef idx="2">
-            <a:schemeClr val="accent1"/>
-          </a:effectRef>
-          <a:fontRef idx="minor">
-            <a:schemeClr val="lt1"/>
-          </a:fontRef>
-        </p:style>
-        <p:txBody>
-          <a:bodyPr rtlCol="0" anchor="ctr"/>
-          <a:lstStyle/>
-          <a:p>
-            <a:pPr algn="ctr"/>
-          </a:p>
-        </p:txBody>
-      </p:sp>
-      <p:sp>
-        <p:nvSpPr>
-          <p:cNvPr id="10" name="TextBox 9"/>
-          <p:cNvSpPr txBox="1"/>
-          <p:nvPr/>
-        </p:nvSpPr>
-        <p:spPr>
-          <a:xfrm>
-            <a:off x="6647688" y="2221992"/>
-            <a:ext cx="4334256" cy="256032"/>
-          </a:xfrm>
-          <a:prstGeom prst="rect">
-            <a:avLst/>
-          </a:prstGeom>
-          <a:noFill/>
-        </p:spPr>
-        <p:txBody>
-          <a:bodyPr wrap="square">
-            <a:spAutoFit/>
-          </a:bodyPr>
-          <a:lstStyle/>
-          <a:p>
-            <a:pPr algn="l"/>
-            <a:r>
-              <a:rPr sz="1300" b="1">
-                <a:solidFill>
-                  <a:srgbClr val="E88C36"/>
-                </a:solidFill>
-                <a:latin typeface="Aptos"/>
-              </a:rPr>
-              <a:t>Acknowledgements</a:t>
-            </a:r>
-          </a:p>
-        </p:txBody>
-      </p:sp>
-      <p:sp>
-        <p:nvSpPr>
-          <p:cNvPr id="11" name="TextBox 10"/>
-          <p:cNvSpPr txBox="1"/>
-          <p:nvPr/>
-        </p:nvSpPr>
-        <p:spPr>
-          <a:xfrm>
-            <a:off x="6647688" y="2578607"/>
-            <a:ext cx="4297680" cy="1261872"/>
-          </a:xfrm>
-          <a:prstGeom prst="rect">
-            <a:avLst/>
-          </a:prstGeom>
-          <a:noFill/>
-        </p:spPr>
-        <p:txBody>
-          <a:bodyPr wrap="square">
-            <a:spAutoFit/>
-          </a:bodyPr>
-          <a:lstStyle/>
-          <a:p>
-            <a:pPr algn="l"/>
-            <a:r>
-              <a:rPr sz="1200" b="0">
-                <a:solidFill>
-                  <a:srgbClr val="152644"/>
-                </a:solidFill>
-                <a:latin typeface="Aptos"/>
-              </a:rPr>
-              <a:t>BIS Hackathon organizers</a:t>
-            </a:r>
-            <a:br/>
-            <a:r>
-              <a:t>Public test set and evaluation script</a:t>
-            </a:r>
-            <a:br/>
-            <a:r>
-              <a:t>Open-source Python ecosystem: PyMuPDF, rank-bm25, RapidFuzz, Streamlit</a:t>
             </a:r>
           </a:p>
         </p:txBody>
